--- a/presentations/figures for patent application.pptx
+++ b/presentations/figures for patent application.pptx
@@ -6144,6 +6144,42 @@
           <a:chExt cx="0" cy="0"/>
         </a:xfrm>
       </p:grpSpPr>
+      <p:pic>
+        <p:nvPicPr>
+          <p:cNvPr id="20" name="Picture 19" descr="A graph of a graph showing a number of different sizes&#10;&#10;AI-generated content may be incorrect.">
+            <a:extLst>
+              <a:ext uri="{FF2B5EF4-FFF2-40B4-BE49-F238E27FC236}">
+                <a16:creationId xmlns:a16="http://schemas.microsoft.com/office/drawing/2014/main" id="{AFC49084-0ABB-74FA-9569-6233A0B03A1B}"/>
+              </a:ext>
+            </a:extLst>
+          </p:cNvPr>
+          <p:cNvPicPr>
+            <a:picLocks noChangeAspect="1"/>
+          </p:cNvPicPr>
+          <p:nvPr/>
+        </p:nvPicPr>
+        <p:blipFill>
+          <a:blip r:embed="rId2">
+            <a:extLst>
+              <a:ext uri="{28A0092B-C50C-407E-A947-70E740481C1C}">
+                <a14:useLocalDpi xmlns:a14="http://schemas.microsoft.com/office/drawing/2010/main" val="0"/>
+              </a:ext>
+            </a:extLst>
+          </a:blip>
+          <a:stretch>
+            <a:fillRect/>
+          </a:stretch>
+        </p:blipFill>
+        <p:spPr>
+          <a:xfrm>
+            <a:off x="2774294" y="1696651"/>
+            <a:ext cx="6400813" cy="3950216"/>
+          </a:xfrm>
+          <a:prstGeom prst="rect">
+            <a:avLst/>
+          </a:prstGeom>
+        </p:spPr>
+      </p:pic>
       <p:sp>
         <p:nvSpPr>
           <p:cNvPr id="2" name="Title 1">
@@ -6165,6 +6201,286 @@
           <a:bodyPr/>
           <a:lstStyle/>
           <a:p>
+            <a:endParaRPr lang="en-US"/>
+          </a:p>
+        </p:txBody>
+      </p:sp>
+      <p:sp>
+        <p:nvSpPr>
+          <p:cNvPr id="6" name="TextBox 5">
+            <a:extLst>
+              <a:ext uri="{FF2B5EF4-FFF2-40B4-BE49-F238E27FC236}">
+                <a16:creationId xmlns:a16="http://schemas.microsoft.com/office/drawing/2014/main" id="{A356BE26-A1D0-866B-769F-640B2A8B8E8F}"/>
+              </a:ext>
+            </a:extLst>
+          </p:cNvPr>
+          <p:cNvSpPr txBox="1"/>
+          <p:nvPr/>
+        </p:nvSpPr>
+        <p:spPr>
+          <a:xfrm>
+            <a:off x="7692845" y="3390237"/>
+            <a:ext cx="924127" cy="230832"/>
+          </a:xfrm>
+          <a:prstGeom prst="rect">
+            <a:avLst/>
+          </a:prstGeom>
+          <a:solidFill>
+            <a:schemeClr val="bg1"/>
+          </a:solidFill>
+        </p:spPr>
+        <p:txBody>
+          <a:bodyPr wrap="square" rtlCol="0">
+            <a:spAutoFit/>
+          </a:bodyPr>
+          <a:lstStyle/>
+          <a:p>
+            <a:r>
+              <a:rPr lang="en-US" sz="900" b="1" dirty="0"/>
+              <a:t>1680 features</a:t>
+            </a:r>
+          </a:p>
+        </p:txBody>
+      </p:sp>
+      <p:sp>
+        <p:nvSpPr>
+          <p:cNvPr id="7" name="TextBox 6">
+            <a:extLst>
+              <a:ext uri="{FF2B5EF4-FFF2-40B4-BE49-F238E27FC236}">
+                <a16:creationId xmlns:a16="http://schemas.microsoft.com/office/drawing/2014/main" id="{6B0CBEE1-92EB-25CC-1740-A66B84850DE2}"/>
+              </a:ext>
+            </a:extLst>
+          </p:cNvPr>
+          <p:cNvSpPr txBox="1"/>
+          <p:nvPr/>
+        </p:nvSpPr>
+        <p:spPr>
+          <a:xfrm>
+            <a:off x="7692845" y="2428028"/>
+            <a:ext cx="886407" cy="230832"/>
+          </a:xfrm>
+          <a:prstGeom prst="rect">
+            <a:avLst/>
+          </a:prstGeom>
+          <a:noFill/>
+        </p:spPr>
+        <p:txBody>
+          <a:bodyPr wrap="square" rtlCol="0">
+            <a:spAutoFit/>
+          </a:bodyPr>
+          <a:lstStyle/>
+          <a:p>
+            <a:r>
+              <a:rPr lang="en-US" sz="900" b="1" dirty="0"/>
+              <a:t>3289 features</a:t>
+            </a:r>
+          </a:p>
+        </p:txBody>
+      </p:sp>
+      <p:sp>
+        <p:nvSpPr>
+          <p:cNvPr id="21" name="TextBox 20">
+            <a:extLst>
+              <a:ext uri="{FF2B5EF4-FFF2-40B4-BE49-F238E27FC236}">
+                <a16:creationId xmlns:a16="http://schemas.microsoft.com/office/drawing/2014/main" id="{E783C494-891C-E00B-1438-3FBDAAD6B216}"/>
+              </a:ext>
+            </a:extLst>
+          </p:cNvPr>
+          <p:cNvSpPr txBox="1"/>
+          <p:nvPr/>
+        </p:nvSpPr>
+        <p:spPr>
+          <a:xfrm>
+            <a:off x="7547572" y="4660804"/>
+            <a:ext cx="1418252" cy="507831"/>
+          </a:xfrm>
+          <a:prstGeom prst="rect">
+            <a:avLst/>
+          </a:prstGeom>
+          <a:noFill/>
+        </p:spPr>
+        <p:txBody>
+          <a:bodyPr wrap="square" rtlCol="0">
+            <a:spAutoFit/>
+          </a:bodyPr>
+          <a:lstStyle/>
+          <a:p>
+            <a:r>
+              <a:rPr lang="en-US" sz="900" b="1" dirty="0">
+                <a:latin typeface="Arial" panose="020B0604020202020204" pitchFamily="34" charset="0"/>
+                <a:cs typeface="Arial" panose="020B0604020202020204" pitchFamily="34" charset="0"/>
+              </a:rPr>
+              <a:t>Point below cutoff</a:t>
+            </a:r>
+          </a:p>
+          <a:p>
+            <a:r>
+              <a:rPr lang="en-US" sz="900" b="1" dirty="0">
+                <a:latin typeface="Arial" panose="020B0604020202020204" pitchFamily="34" charset="0"/>
+                <a:cs typeface="Arial" panose="020B0604020202020204" pitchFamily="34" charset="0"/>
+              </a:rPr>
+              <a:t>Point above cutoff</a:t>
+            </a:r>
+          </a:p>
+          <a:p>
+            <a:r>
+              <a:rPr lang="en-US" sz="900" b="1" dirty="0">
+                <a:latin typeface="Arial" panose="020B0604020202020204" pitchFamily="34" charset="0"/>
+                <a:cs typeface="Arial" panose="020B0604020202020204" pitchFamily="34" charset="0"/>
+              </a:rPr>
+              <a:t>PFAS suspect</a:t>
+            </a:r>
+          </a:p>
+        </p:txBody>
+      </p:sp>
+      <p:sp>
+        <p:nvSpPr>
+          <p:cNvPr id="23" name="Oval 22">
+            <a:extLst>
+              <a:ext uri="{FF2B5EF4-FFF2-40B4-BE49-F238E27FC236}">
+                <a16:creationId xmlns:a16="http://schemas.microsoft.com/office/drawing/2014/main" id="{8DE6D488-E57F-98DB-EB9F-1A6AC35BC4E2}"/>
+              </a:ext>
+            </a:extLst>
+          </p:cNvPr>
+          <p:cNvSpPr/>
+          <p:nvPr/>
+        </p:nvSpPr>
+        <p:spPr>
+          <a:xfrm>
+            <a:off x="7481888" y="4737487"/>
+            <a:ext cx="95250" cy="91440"/>
+          </a:xfrm>
+          <a:prstGeom prst="ellipse">
+            <a:avLst/>
+          </a:prstGeom>
+          <a:noFill/>
+        </p:spPr>
+        <p:style>
+          <a:lnRef idx="2">
+            <a:schemeClr val="accent1">
+              <a:shade val="15000"/>
+            </a:schemeClr>
+          </a:lnRef>
+          <a:fillRef idx="1">
+            <a:schemeClr val="accent1"/>
+          </a:fillRef>
+          <a:effectRef idx="0">
+            <a:schemeClr val="accent1"/>
+          </a:effectRef>
+          <a:fontRef idx="minor">
+            <a:schemeClr val="lt1"/>
+          </a:fontRef>
+        </p:style>
+        <p:txBody>
+          <a:bodyPr rtlCol="0" anchor="ctr"/>
+          <a:lstStyle/>
+          <a:p>
+            <a:pPr algn="ctr"/>
+            <a:endParaRPr lang="en-US"/>
+          </a:p>
+        </p:txBody>
+      </p:sp>
+      <p:sp>
+        <p:nvSpPr>
+          <p:cNvPr id="24" name="Oval 23">
+            <a:extLst>
+              <a:ext uri="{FF2B5EF4-FFF2-40B4-BE49-F238E27FC236}">
+                <a16:creationId xmlns:a16="http://schemas.microsoft.com/office/drawing/2014/main" id="{613B9BEA-63E8-D97D-66CA-9426FEDF1E88}"/>
+              </a:ext>
+            </a:extLst>
+          </p:cNvPr>
+          <p:cNvSpPr/>
+          <p:nvPr/>
+        </p:nvSpPr>
+        <p:spPr>
+          <a:xfrm>
+            <a:off x="7481888" y="4868999"/>
+            <a:ext cx="95250" cy="91440"/>
+          </a:xfrm>
+          <a:prstGeom prst="ellipse">
+            <a:avLst/>
+          </a:prstGeom>
+          <a:solidFill>
+            <a:schemeClr val="tx1"/>
+          </a:solidFill>
+          <a:ln>
+            <a:solidFill>
+              <a:schemeClr val="tx1"/>
+            </a:solidFill>
+          </a:ln>
+        </p:spPr>
+        <p:style>
+          <a:lnRef idx="2">
+            <a:schemeClr val="accent1">
+              <a:shade val="15000"/>
+            </a:schemeClr>
+          </a:lnRef>
+          <a:fillRef idx="1">
+            <a:schemeClr val="accent1"/>
+          </a:fillRef>
+          <a:effectRef idx="0">
+            <a:schemeClr val="accent1"/>
+          </a:effectRef>
+          <a:fontRef idx="minor">
+            <a:schemeClr val="lt1"/>
+          </a:fontRef>
+        </p:style>
+        <p:txBody>
+          <a:bodyPr rtlCol="0" anchor="ctr"/>
+          <a:lstStyle/>
+          <a:p>
+            <a:pPr algn="ctr"/>
+            <a:endParaRPr lang="en-US"/>
+          </a:p>
+        </p:txBody>
+      </p:sp>
+      <p:sp>
+        <p:nvSpPr>
+          <p:cNvPr id="25" name="Multiplication Sign 24">
+            <a:extLst>
+              <a:ext uri="{FF2B5EF4-FFF2-40B4-BE49-F238E27FC236}">
+                <a16:creationId xmlns:a16="http://schemas.microsoft.com/office/drawing/2014/main" id="{46D82F40-4B13-0EFF-526B-04567C36BDD9}"/>
+              </a:ext>
+            </a:extLst>
+          </p:cNvPr>
+          <p:cNvSpPr/>
+          <p:nvPr/>
+        </p:nvSpPr>
+        <p:spPr>
+          <a:xfrm>
+            <a:off x="7447359" y="4960439"/>
+            <a:ext cx="164307" cy="166801"/>
+          </a:xfrm>
+          <a:prstGeom prst="mathMultiply">
+            <a:avLst>
+              <a:gd name="adj1" fmla="val 15708"/>
+            </a:avLst>
+          </a:prstGeom>
+          <a:solidFill>
+            <a:schemeClr val="tx1"/>
+          </a:solidFill>
+        </p:spPr>
+        <p:style>
+          <a:lnRef idx="2">
+            <a:schemeClr val="accent1">
+              <a:shade val="15000"/>
+            </a:schemeClr>
+          </a:lnRef>
+          <a:fillRef idx="1">
+            <a:schemeClr val="accent1"/>
+          </a:fillRef>
+          <a:effectRef idx="0">
+            <a:schemeClr val="accent1"/>
+          </a:effectRef>
+          <a:fontRef idx="minor">
+            <a:schemeClr val="lt1"/>
+          </a:fontRef>
+        </p:style>
+        <p:txBody>
+          <a:bodyPr rtlCol="0" anchor="ctr"/>
+          <a:lstStyle/>
+          <a:p>
+            <a:pPr algn="ctr"/>
             <a:endParaRPr lang="en-US"/>
           </a:p>
         </p:txBody>

--- a/presentations/figures for patent application.pptx
+++ b/presentations/figures for patent application.pptx
@@ -8,6 +8,7 @@
     <p:sldId id="256" r:id="rId2"/>
     <p:sldId id="257" r:id="rId3"/>
     <p:sldId id="258" r:id="rId4"/>
+    <p:sldId id="259" r:id="rId5"/>
   </p:sldIdLst>
   <p:sldSz cx="12192000" cy="6858000"/>
   <p:notesSz cx="6858000" cy="9144000"/>
@@ -6219,7 +6220,7 @@
         </p:nvSpPr>
         <p:spPr>
           <a:xfrm>
-            <a:off x="7692845" y="3390237"/>
+            <a:off x="7692845" y="3313584"/>
             <a:ext cx="924127" cy="230832"/>
           </a:xfrm>
           <a:prstGeom prst="rect">
@@ -6485,10 +6486,516 @@
           </a:p>
         </p:txBody>
       </p:sp>
+      <p:sp>
+        <p:nvSpPr>
+          <p:cNvPr id="26" name="TextBox 25">
+            <a:extLst>
+              <a:ext uri="{FF2B5EF4-FFF2-40B4-BE49-F238E27FC236}">
+                <a16:creationId xmlns:a16="http://schemas.microsoft.com/office/drawing/2014/main" id="{6083F25A-050E-ADBE-152C-9F4B46CDAC1E}"/>
+              </a:ext>
+            </a:extLst>
+          </p:cNvPr>
+          <p:cNvSpPr txBox="1"/>
+          <p:nvPr/>
+        </p:nvSpPr>
+        <p:spPr>
+          <a:xfrm>
+            <a:off x="4423608" y="2079812"/>
+            <a:ext cx="3102184" cy="276999"/>
+          </a:xfrm>
+          <a:prstGeom prst="rect">
+            <a:avLst/>
+          </a:prstGeom>
+          <a:noFill/>
+        </p:spPr>
+        <p:txBody>
+          <a:bodyPr wrap="square" rtlCol="0">
+            <a:spAutoFit/>
+          </a:bodyPr>
+          <a:lstStyle/>
+          <a:p>
+            <a:pPr algn="ctr"/>
+            <a:r>
+              <a:rPr lang="en-US" sz="1200" b="1" u="sng" dirty="0">
+                <a:latin typeface="Arial" panose="020B0604020202020204" pitchFamily="34" charset="0"/>
+                <a:cs typeface="Arial" panose="020B0604020202020204" pitchFamily="34" charset="0"/>
+              </a:rPr>
+              <a:t>CCS v </a:t>
+            </a:r>
+            <a:r>
+              <a:rPr lang="en-US" sz="1200" b="1" i="1" u="sng" dirty="0">
+                <a:latin typeface="Arial" panose="020B0604020202020204" pitchFamily="34" charset="0"/>
+                <a:cs typeface="Arial" panose="020B0604020202020204" pitchFamily="34" charset="0"/>
+              </a:rPr>
+              <a:t>m/z</a:t>
+            </a:r>
+            <a:r>
+              <a:rPr lang="en-US" sz="1200" b="1" u="sng" dirty="0">
+                <a:latin typeface="Arial" panose="020B0604020202020204" pitchFamily="34" charset="0"/>
+                <a:cs typeface="Arial" panose="020B0604020202020204" pitchFamily="34" charset="0"/>
+              </a:rPr>
+              <a:t> cutoff</a:t>
+            </a:r>
+          </a:p>
+        </p:txBody>
+      </p:sp>
     </p:spTree>
     <p:extLst>
       <p:ext uri="{BB962C8B-B14F-4D97-AF65-F5344CB8AC3E}">
         <p14:creationId xmlns:p14="http://schemas.microsoft.com/office/powerpoint/2010/main" val="4027698738"/>
+      </p:ext>
+    </p:extLst>
+  </p:cSld>
+  <p:clrMapOvr>
+    <a:masterClrMapping/>
+  </p:clrMapOvr>
+</p:sld>
+</file>
+
+<file path=ppt/slides/slide4.xml><?xml version="1.0" encoding="utf-8"?>
+<p:sld xmlns:a="http://schemas.openxmlformats.org/drawingml/2006/main" xmlns:r="http://schemas.openxmlformats.org/officeDocument/2006/relationships" xmlns:p="http://schemas.openxmlformats.org/presentationml/2006/main">
+  <p:cSld>
+    <p:spTree>
+      <p:nvGrpSpPr>
+        <p:cNvPr id="1" name="">
+          <a:extLst>
+            <a:ext uri="{FF2B5EF4-FFF2-40B4-BE49-F238E27FC236}">
+              <a16:creationId xmlns:a16="http://schemas.microsoft.com/office/drawing/2014/main" id="{C0F630E2-EF1B-EA04-DB6F-9A1DFC27733D}"/>
+            </a:ext>
+          </a:extLst>
+        </p:cNvPr>
+        <p:cNvGrpSpPr/>
+        <p:nvPr/>
+      </p:nvGrpSpPr>
+      <p:grpSpPr>
+        <a:xfrm>
+          <a:off x="0" y="0"/>
+          <a:ext cx="0" cy="0"/>
+          <a:chOff x="0" y="0"/>
+          <a:chExt cx="0" cy="0"/>
+        </a:xfrm>
+      </p:grpSpPr>
+      <p:cxnSp>
+        <p:nvCxnSpPr>
+          <p:cNvPr id="8" name="Straight Arrow Connector 7">
+            <a:extLst>
+              <a:ext uri="{FF2B5EF4-FFF2-40B4-BE49-F238E27FC236}">
+                <a16:creationId xmlns:a16="http://schemas.microsoft.com/office/drawing/2014/main" id="{293F89AA-405C-87B6-6F36-02F63A783F15}"/>
+              </a:ext>
+            </a:extLst>
+          </p:cNvPr>
+          <p:cNvCxnSpPr/>
+          <p:nvPr/>
+        </p:nvCxnSpPr>
+        <p:spPr>
+          <a:xfrm>
+            <a:off x="5097888" y="1829295"/>
+            <a:ext cx="0" cy="2140085"/>
+          </a:xfrm>
+          <a:prstGeom prst="straightConnector1">
+            <a:avLst/>
+          </a:prstGeom>
+          <a:ln>
+            <a:headEnd type="triangle"/>
+            <a:tailEnd type="triangle"/>
+          </a:ln>
+        </p:spPr>
+        <p:style>
+          <a:lnRef idx="2">
+            <a:schemeClr val="dk1"/>
+          </a:lnRef>
+          <a:fillRef idx="0">
+            <a:schemeClr val="dk1"/>
+          </a:fillRef>
+          <a:effectRef idx="1">
+            <a:schemeClr val="dk1"/>
+          </a:effectRef>
+          <a:fontRef idx="minor">
+            <a:schemeClr val="tx1"/>
+          </a:fontRef>
+        </p:style>
+      </p:cxnSp>
+      <p:pic>
+        <p:nvPicPr>
+          <p:cNvPr id="10" name="Picture 9" descr="A graph with a curve&#10;&#10;AI-generated content may be incorrect.">
+            <a:extLst>
+              <a:ext uri="{FF2B5EF4-FFF2-40B4-BE49-F238E27FC236}">
+                <a16:creationId xmlns:a16="http://schemas.microsoft.com/office/drawing/2014/main" id="{7CEB56D0-AD77-8D3B-B6BE-F32A658CE20F}"/>
+              </a:ext>
+            </a:extLst>
+          </p:cNvPr>
+          <p:cNvPicPr>
+            <a:picLocks noChangeAspect="1"/>
+          </p:cNvPicPr>
+          <p:nvPr/>
+        </p:nvPicPr>
+        <p:blipFill>
+          <a:blip r:embed="rId2">
+            <a:extLst>
+              <a:ext uri="{28A0092B-C50C-407E-A947-70E740481C1C}">
+                <a14:useLocalDpi xmlns:a14="http://schemas.microsoft.com/office/drawing/2010/main" val="0"/>
+              </a:ext>
+            </a:extLst>
+          </a:blip>
+          <a:srcRect l="18231" t="13484" r="11870" b="7215"/>
+          <a:stretch/>
+        </p:blipFill>
+        <p:spPr>
+          <a:xfrm>
+            <a:off x="3191069" y="1091682"/>
+            <a:ext cx="6391470" cy="5075854"/>
+          </a:xfrm>
+          <a:prstGeom prst="rect">
+            <a:avLst/>
+          </a:prstGeom>
+        </p:spPr>
+      </p:pic>
+      <p:cxnSp>
+        <p:nvCxnSpPr>
+          <p:cNvPr id="12" name="Straight Connector 11">
+            <a:extLst>
+              <a:ext uri="{FF2B5EF4-FFF2-40B4-BE49-F238E27FC236}">
+                <a16:creationId xmlns:a16="http://schemas.microsoft.com/office/drawing/2014/main" id="{6E585AA8-3FCD-A3C0-E142-A552BD306E77}"/>
+              </a:ext>
+            </a:extLst>
+          </p:cNvPr>
+          <p:cNvCxnSpPr>
+            <a:cxnSpLocks/>
+          </p:cNvCxnSpPr>
+          <p:nvPr/>
+        </p:nvCxnSpPr>
+        <p:spPr>
+          <a:xfrm flipV="1">
+            <a:off x="5256120" y="1831133"/>
+            <a:ext cx="292608" cy="163286"/>
+          </a:xfrm>
+          <a:prstGeom prst="line">
+            <a:avLst/>
+          </a:prstGeom>
+        </p:spPr>
+        <p:style>
+          <a:lnRef idx="2">
+            <a:schemeClr val="dk1"/>
+          </a:lnRef>
+          <a:fillRef idx="0">
+            <a:schemeClr val="dk1"/>
+          </a:fillRef>
+          <a:effectRef idx="1">
+            <a:schemeClr val="dk1"/>
+          </a:effectRef>
+          <a:fontRef idx="minor">
+            <a:schemeClr val="tx1"/>
+          </a:fontRef>
+        </p:style>
+      </p:cxnSp>
+      <p:cxnSp>
+        <p:nvCxnSpPr>
+          <p:cNvPr id="14" name="Straight Connector 13">
+            <a:extLst>
+              <a:ext uri="{FF2B5EF4-FFF2-40B4-BE49-F238E27FC236}">
+                <a16:creationId xmlns:a16="http://schemas.microsoft.com/office/drawing/2014/main" id="{FA9B04BE-3051-59AF-5A29-10CEF5E3E263}"/>
+              </a:ext>
+            </a:extLst>
+          </p:cNvPr>
+          <p:cNvCxnSpPr>
+            <a:cxnSpLocks/>
+          </p:cNvCxnSpPr>
+          <p:nvPr/>
+        </p:nvCxnSpPr>
+        <p:spPr>
+          <a:xfrm>
+            <a:off x="5402424" y="1912776"/>
+            <a:ext cx="0" cy="1918364"/>
+          </a:xfrm>
+          <a:prstGeom prst="line">
+            <a:avLst/>
+          </a:prstGeom>
+        </p:spPr>
+        <p:style>
+          <a:lnRef idx="2">
+            <a:schemeClr val="dk1"/>
+          </a:lnRef>
+          <a:fillRef idx="0">
+            <a:schemeClr val="dk1"/>
+          </a:fillRef>
+          <a:effectRef idx="1">
+            <a:schemeClr val="dk1"/>
+          </a:effectRef>
+          <a:fontRef idx="minor">
+            <a:schemeClr val="tx1"/>
+          </a:fontRef>
+        </p:style>
+      </p:cxnSp>
+      <p:cxnSp>
+        <p:nvCxnSpPr>
+          <p:cNvPr id="17" name="Straight Connector 16">
+            <a:extLst>
+              <a:ext uri="{FF2B5EF4-FFF2-40B4-BE49-F238E27FC236}">
+                <a16:creationId xmlns:a16="http://schemas.microsoft.com/office/drawing/2014/main" id="{C1826AD7-98D4-CE2F-A179-9A0440E407CB}"/>
+              </a:ext>
+            </a:extLst>
+          </p:cNvPr>
+          <p:cNvCxnSpPr>
+            <a:cxnSpLocks/>
+          </p:cNvCxnSpPr>
+          <p:nvPr/>
+        </p:nvCxnSpPr>
+        <p:spPr>
+          <a:xfrm flipV="1">
+            <a:off x="5256120" y="3749497"/>
+            <a:ext cx="292608" cy="163286"/>
+          </a:xfrm>
+          <a:prstGeom prst="line">
+            <a:avLst/>
+          </a:prstGeom>
+        </p:spPr>
+        <p:style>
+          <a:lnRef idx="2">
+            <a:schemeClr val="dk1"/>
+          </a:lnRef>
+          <a:fillRef idx="0">
+            <a:schemeClr val="dk1"/>
+          </a:fillRef>
+          <a:effectRef idx="1">
+            <a:schemeClr val="dk1"/>
+          </a:effectRef>
+          <a:fontRef idx="minor">
+            <a:schemeClr val="tx1"/>
+          </a:fontRef>
+        </p:style>
+      </p:cxnSp>
+      <p:cxnSp>
+        <p:nvCxnSpPr>
+          <p:cNvPr id="18" name="Straight Connector 17">
+            <a:extLst>
+              <a:ext uri="{FF2B5EF4-FFF2-40B4-BE49-F238E27FC236}">
+                <a16:creationId xmlns:a16="http://schemas.microsoft.com/office/drawing/2014/main" id="{4CEC00DC-D94B-9676-8D8A-D1FE5106CE0C}"/>
+              </a:ext>
+            </a:extLst>
+          </p:cNvPr>
+          <p:cNvCxnSpPr>
+            <a:cxnSpLocks/>
+          </p:cNvCxnSpPr>
+          <p:nvPr/>
+        </p:nvCxnSpPr>
+        <p:spPr>
+          <a:xfrm flipH="1" flipV="1">
+            <a:off x="6643110" y="4621237"/>
+            <a:ext cx="451263" cy="73152"/>
+          </a:xfrm>
+          <a:prstGeom prst="line">
+            <a:avLst/>
+          </a:prstGeom>
+        </p:spPr>
+        <p:style>
+          <a:lnRef idx="2">
+            <a:schemeClr val="dk1"/>
+          </a:lnRef>
+          <a:fillRef idx="0">
+            <a:schemeClr val="dk1"/>
+          </a:fillRef>
+          <a:effectRef idx="1">
+            <a:schemeClr val="dk1"/>
+          </a:effectRef>
+          <a:fontRef idx="minor">
+            <a:schemeClr val="tx1"/>
+          </a:fontRef>
+        </p:style>
+      </p:cxnSp>
+      <p:cxnSp>
+        <p:nvCxnSpPr>
+          <p:cNvPr id="19" name="Straight Connector 18">
+            <a:extLst>
+              <a:ext uri="{FF2B5EF4-FFF2-40B4-BE49-F238E27FC236}">
+                <a16:creationId xmlns:a16="http://schemas.microsoft.com/office/drawing/2014/main" id="{FC475CBB-CE22-7EFD-2E4B-8463BC45D1B7}"/>
+              </a:ext>
+            </a:extLst>
+          </p:cNvPr>
+          <p:cNvCxnSpPr>
+            <a:cxnSpLocks/>
+          </p:cNvCxnSpPr>
+          <p:nvPr/>
+        </p:nvCxnSpPr>
+        <p:spPr>
+          <a:xfrm flipV="1">
+            <a:off x="5959466" y="4665733"/>
+            <a:ext cx="909276" cy="625441"/>
+          </a:xfrm>
+          <a:prstGeom prst="line">
+            <a:avLst/>
+          </a:prstGeom>
+        </p:spPr>
+        <p:style>
+          <a:lnRef idx="2">
+            <a:schemeClr val="dk1"/>
+          </a:lnRef>
+          <a:fillRef idx="0">
+            <a:schemeClr val="dk1"/>
+          </a:fillRef>
+          <a:effectRef idx="1">
+            <a:schemeClr val="dk1"/>
+          </a:effectRef>
+          <a:fontRef idx="minor">
+            <a:schemeClr val="tx1"/>
+          </a:fontRef>
+        </p:style>
+      </p:cxnSp>
+      <p:cxnSp>
+        <p:nvCxnSpPr>
+          <p:cNvPr id="31" name="Straight Connector 30">
+            <a:extLst>
+              <a:ext uri="{FF2B5EF4-FFF2-40B4-BE49-F238E27FC236}">
+                <a16:creationId xmlns:a16="http://schemas.microsoft.com/office/drawing/2014/main" id="{75A444B0-5771-AC69-FE61-51603614D6AF}"/>
+              </a:ext>
+            </a:extLst>
+          </p:cNvPr>
+          <p:cNvCxnSpPr>
+            <a:cxnSpLocks/>
+          </p:cNvCxnSpPr>
+          <p:nvPr/>
+        </p:nvCxnSpPr>
+        <p:spPr>
+          <a:xfrm flipH="1" flipV="1">
+            <a:off x="5733835" y="5254598"/>
+            <a:ext cx="451263" cy="73152"/>
+          </a:xfrm>
+          <a:prstGeom prst="line">
+            <a:avLst/>
+          </a:prstGeom>
+        </p:spPr>
+        <p:style>
+          <a:lnRef idx="2">
+            <a:schemeClr val="dk1"/>
+          </a:lnRef>
+          <a:fillRef idx="0">
+            <a:schemeClr val="dk1"/>
+          </a:fillRef>
+          <a:effectRef idx="1">
+            <a:schemeClr val="dk1"/>
+          </a:effectRef>
+          <a:fontRef idx="minor">
+            <a:schemeClr val="tx1"/>
+          </a:fontRef>
+        </p:style>
+      </p:cxnSp>
+      <p:cxnSp>
+        <p:nvCxnSpPr>
+          <p:cNvPr id="33" name="Straight Connector 32">
+            <a:extLst>
+              <a:ext uri="{FF2B5EF4-FFF2-40B4-BE49-F238E27FC236}">
+                <a16:creationId xmlns:a16="http://schemas.microsoft.com/office/drawing/2014/main" id="{941169B4-0704-655E-C489-E5D2AC10E9F4}"/>
+              </a:ext>
+            </a:extLst>
+          </p:cNvPr>
+          <p:cNvCxnSpPr>
+            <a:cxnSpLocks/>
+          </p:cNvCxnSpPr>
+          <p:nvPr/>
+        </p:nvCxnSpPr>
+        <p:spPr>
+          <a:xfrm>
+            <a:off x="4123808" y="4741460"/>
+            <a:ext cx="1200302" cy="275914"/>
+          </a:xfrm>
+          <a:prstGeom prst="line">
+            <a:avLst/>
+          </a:prstGeom>
+        </p:spPr>
+        <p:style>
+          <a:lnRef idx="2">
+            <a:schemeClr val="dk1"/>
+          </a:lnRef>
+          <a:fillRef idx="0">
+            <a:schemeClr val="dk1"/>
+          </a:fillRef>
+          <a:effectRef idx="1">
+            <a:schemeClr val="dk1"/>
+          </a:effectRef>
+          <a:fontRef idx="minor">
+            <a:schemeClr val="tx1"/>
+          </a:fontRef>
+        </p:style>
+      </p:cxnSp>
+      <p:cxnSp>
+        <p:nvCxnSpPr>
+          <p:cNvPr id="38" name="Straight Connector 37">
+            <a:extLst>
+              <a:ext uri="{FF2B5EF4-FFF2-40B4-BE49-F238E27FC236}">
+                <a16:creationId xmlns:a16="http://schemas.microsoft.com/office/drawing/2014/main" id="{9781EF69-5475-3D79-F3BE-2F880152AEE7}"/>
+              </a:ext>
+            </a:extLst>
+          </p:cNvPr>
+          <p:cNvCxnSpPr>
+            <a:cxnSpLocks/>
+          </p:cNvCxnSpPr>
+          <p:nvPr/>
+        </p:nvCxnSpPr>
+        <p:spPr>
+          <a:xfrm flipH="1">
+            <a:off x="3977402" y="4639318"/>
+            <a:ext cx="298831" cy="188445"/>
+          </a:xfrm>
+          <a:prstGeom prst="line">
+            <a:avLst/>
+          </a:prstGeom>
+        </p:spPr>
+        <p:style>
+          <a:lnRef idx="2">
+            <a:schemeClr val="dk1"/>
+          </a:lnRef>
+          <a:fillRef idx="0">
+            <a:schemeClr val="dk1"/>
+          </a:fillRef>
+          <a:effectRef idx="1">
+            <a:schemeClr val="dk1"/>
+          </a:effectRef>
+          <a:fontRef idx="minor">
+            <a:schemeClr val="tx1"/>
+          </a:fontRef>
+        </p:style>
+      </p:cxnSp>
+      <p:cxnSp>
+        <p:nvCxnSpPr>
+          <p:cNvPr id="40" name="Straight Connector 39">
+            <a:extLst>
+              <a:ext uri="{FF2B5EF4-FFF2-40B4-BE49-F238E27FC236}">
+                <a16:creationId xmlns:a16="http://schemas.microsoft.com/office/drawing/2014/main" id="{39AD6533-7F0F-F95C-1572-74B91B9A2796}"/>
+              </a:ext>
+            </a:extLst>
+          </p:cNvPr>
+          <p:cNvCxnSpPr>
+            <a:cxnSpLocks/>
+          </p:cNvCxnSpPr>
+          <p:nvPr/>
+        </p:nvCxnSpPr>
+        <p:spPr>
+          <a:xfrm flipH="1">
+            <a:off x="5173336" y="4888748"/>
+            <a:ext cx="298831" cy="249049"/>
+          </a:xfrm>
+          <a:prstGeom prst="line">
+            <a:avLst/>
+          </a:prstGeom>
+        </p:spPr>
+        <p:style>
+          <a:lnRef idx="2">
+            <a:schemeClr val="dk1"/>
+          </a:lnRef>
+          <a:fillRef idx="0">
+            <a:schemeClr val="dk1"/>
+          </a:fillRef>
+          <a:effectRef idx="1">
+            <a:schemeClr val="dk1"/>
+          </a:effectRef>
+          <a:fontRef idx="minor">
+            <a:schemeClr val="tx1"/>
+          </a:fontRef>
+        </p:style>
+      </p:cxnSp>
+    </p:spTree>
+    <p:extLst>
+      <p:ext uri="{BB962C8B-B14F-4D97-AF65-F5344CB8AC3E}">
+        <p14:creationId xmlns:p14="http://schemas.microsoft.com/office/powerpoint/2010/main" val="1303886916"/>
       </p:ext>
     </p:extLst>
   </p:cSld>
